--- a/docs/ppt/孟帅_毕设开题.pptx
+++ b/docs/ppt/孟帅_毕设开题.pptx
@@ -210,7 +210,7 @@
           <a:p>
             <a:fld id="{2105C8FE-0176-40C5-9514-1F7F7A4E530E}" type="datetimeFigureOut">
               <a:rPr lang="zh-CN" altLang="en-US" smtClean="0"/>
-              <a:t>2026/1/6</a:t>
+              <a:t>2026/3/30</a:t>
             </a:fld>
             <a:endParaRPr lang="zh-CN" altLang="en-US"/>
           </a:p>
@@ -1829,7 +1829,7 @@
           <a:p>
             <a:fld id="{7D3EF85B-AD69-4594-A51C-3BA94401DC9B}" type="datetimeFigureOut">
               <a:rPr lang="zh-CN" altLang="en-US" smtClean="0"/>
-              <a:t>2026/1/6</a:t>
+              <a:t>2026/3/30</a:t>
             </a:fld>
             <a:endParaRPr lang="zh-CN" altLang="en-US"/>
           </a:p>
@@ -2027,7 +2027,7 @@
           <a:p>
             <a:fld id="{7D3EF85B-AD69-4594-A51C-3BA94401DC9B}" type="datetimeFigureOut">
               <a:rPr lang="zh-CN" altLang="en-US" smtClean="0"/>
-              <a:t>2026/1/6</a:t>
+              <a:t>2026/3/30</a:t>
             </a:fld>
             <a:endParaRPr lang="zh-CN" altLang="en-US"/>
           </a:p>
@@ -2235,7 +2235,7 @@
           <a:p>
             <a:fld id="{7D3EF85B-AD69-4594-A51C-3BA94401DC9B}" type="datetimeFigureOut">
               <a:rPr lang="zh-CN" altLang="en-US" smtClean="0"/>
-              <a:t>2026/1/6</a:t>
+              <a:t>2026/3/30</a:t>
             </a:fld>
             <a:endParaRPr lang="zh-CN" altLang="en-US"/>
           </a:p>
@@ -2469,7 +2469,7 @@
           <a:p>
             <a:fld id="{7D3EF85B-AD69-4594-A51C-3BA94401DC9B}" type="datetimeFigureOut">
               <a:rPr lang="zh-CN" altLang="en-US" smtClean="0"/>
-              <a:t>2026/1/6</a:t>
+              <a:t>2026/3/30</a:t>
             </a:fld>
             <a:endParaRPr lang="zh-CN" altLang="en-US"/>
           </a:p>
@@ -2744,7 +2744,7 @@
           <a:p>
             <a:fld id="{7D3EF85B-AD69-4594-A51C-3BA94401DC9B}" type="datetimeFigureOut">
               <a:rPr lang="zh-CN" altLang="en-US" smtClean="0"/>
-              <a:t>2026/1/6</a:t>
+              <a:t>2026/3/30</a:t>
             </a:fld>
             <a:endParaRPr lang="zh-CN" altLang="en-US"/>
           </a:p>
@@ -3009,7 +3009,7 @@
           <a:p>
             <a:fld id="{7D3EF85B-AD69-4594-A51C-3BA94401DC9B}" type="datetimeFigureOut">
               <a:rPr lang="zh-CN" altLang="en-US" smtClean="0"/>
-              <a:t>2026/1/6</a:t>
+              <a:t>2026/3/30</a:t>
             </a:fld>
             <a:endParaRPr lang="zh-CN" altLang="en-US"/>
           </a:p>
@@ -3421,7 +3421,7 @@
           <a:p>
             <a:fld id="{7D3EF85B-AD69-4594-A51C-3BA94401DC9B}" type="datetimeFigureOut">
               <a:rPr lang="zh-CN" altLang="en-US" smtClean="0"/>
-              <a:t>2026/1/6</a:t>
+              <a:t>2026/3/30</a:t>
             </a:fld>
             <a:endParaRPr lang="zh-CN" altLang="en-US"/>
           </a:p>
@@ -3562,7 +3562,7 @@
           <a:p>
             <a:fld id="{7D3EF85B-AD69-4594-A51C-3BA94401DC9B}" type="datetimeFigureOut">
               <a:rPr lang="zh-CN" altLang="en-US" smtClean="0"/>
-              <a:t>2026/1/6</a:t>
+              <a:t>2026/3/30</a:t>
             </a:fld>
             <a:endParaRPr lang="zh-CN" altLang="en-US"/>
           </a:p>
@@ -3675,7 +3675,7 @@
           <a:p>
             <a:fld id="{7D3EF85B-AD69-4594-A51C-3BA94401DC9B}" type="datetimeFigureOut">
               <a:rPr lang="zh-CN" altLang="en-US" smtClean="0"/>
-              <a:t>2026/1/6</a:t>
+              <a:t>2026/3/30</a:t>
             </a:fld>
             <a:endParaRPr lang="zh-CN" altLang="en-US"/>
           </a:p>
@@ -3986,7 +3986,7 @@
           <a:p>
             <a:fld id="{7D3EF85B-AD69-4594-A51C-3BA94401DC9B}" type="datetimeFigureOut">
               <a:rPr lang="zh-CN" altLang="en-US" smtClean="0"/>
-              <a:t>2026/1/6</a:t>
+              <a:t>2026/3/30</a:t>
             </a:fld>
             <a:endParaRPr lang="zh-CN" altLang="en-US"/>
           </a:p>
@@ -4274,7 +4274,7 @@
           <a:p>
             <a:fld id="{7D3EF85B-AD69-4594-A51C-3BA94401DC9B}" type="datetimeFigureOut">
               <a:rPr lang="zh-CN" altLang="en-US" smtClean="0"/>
-              <a:t>2026/1/6</a:t>
+              <a:t>2026/3/30</a:t>
             </a:fld>
             <a:endParaRPr lang="zh-CN" altLang="en-US"/>
           </a:p>
@@ -4515,7 +4515,7 @@
           <a:p>
             <a:fld id="{7D3EF85B-AD69-4594-A51C-3BA94401DC9B}" type="datetimeFigureOut">
               <a:rPr lang="zh-CN" altLang="en-US" smtClean="0"/>
-              <a:t>2026/1/6</a:t>
+              <a:t>2026/3/30</a:t>
             </a:fld>
             <a:endParaRPr lang="zh-CN" altLang="en-US"/>
           </a:p>
@@ -5421,7 +5421,7 @@
         <p:fade/>
       </p:transition>
     </mc:Choice>
-    <mc:Fallback xmlns:p159="http://schemas.microsoft.com/office/powerpoint/2015/09/main" xmlns:p15="http://schemas.microsoft.com/office/powerpoint/2012/main" xmlns:a14="http://schemas.microsoft.com/office/drawing/2010/main" xmlns:wp="http://schemas.openxmlformats.org/drawingml/2006/wordprocessingDrawing" xmlns:w="http://schemas.openxmlformats.org/wordprocessingml/2006/main" xmlns:m="http://schemas.openxmlformats.org/officeDocument/2006/math" xmlns="">
+    <mc:Fallback xmlns="" xmlns:m="http://schemas.openxmlformats.org/officeDocument/2006/math" xmlns:w="http://schemas.openxmlformats.org/wordprocessingml/2006/main" xmlns:wp="http://schemas.openxmlformats.org/drawingml/2006/wordprocessingDrawing" xmlns:a14="http://schemas.microsoft.com/office/drawing/2010/main" xmlns:p15="http://schemas.microsoft.com/office/powerpoint/2012/main" xmlns:p159="http://schemas.microsoft.com/office/powerpoint/2015/09/main">
       <p:transition spd="med">
         <p:fade/>
       </p:transition>
@@ -6543,7 +6543,7 @@
         <p:fade/>
       </p:transition>
     </mc:Choice>
-    <mc:Fallback xmlns:p159="http://schemas.microsoft.com/office/powerpoint/2015/09/main" xmlns:p15="http://schemas.microsoft.com/office/powerpoint/2012/main" xmlns:a14="http://schemas.microsoft.com/office/drawing/2010/main" xmlns:wp="http://schemas.openxmlformats.org/drawingml/2006/wordprocessingDrawing" xmlns:w="http://schemas.openxmlformats.org/wordprocessingml/2006/main" xmlns:m="http://schemas.openxmlformats.org/officeDocument/2006/math" xmlns="">
+    <mc:Fallback xmlns="" xmlns:m="http://schemas.openxmlformats.org/officeDocument/2006/math" xmlns:w="http://schemas.openxmlformats.org/wordprocessingml/2006/main" xmlns:wp="http://schemas.openxmlformats.org/drawingml/2006/wordprocessingDrawing" xmlns:a14="http://schemas.microsoft.com/office/drawing/2010/main" xmlns:p15="http://schemas.microsoft.com/office/powerpoint/2012/main" xmlns:p159="http://schemas.microsoft.com/office/powerpoint/2015/09/main">
       <p:transition spd="med">
         <p:fade/>
       </p:transition>
@@ -7744,7 +7744,7 @@
         <p:fade/>
       </p:transition>
     </mc:Choice>
-    <mc:Fallback xmlns:p159="http://schemas.microsoft.com/office/powerpoint/2015/09/main" xmlns:p15="http://schemas.microsoft.com/office/powerpoint/2012/main" xmlns:a14="http://schemas.microsoft.com/office/drawing/2010/main" xmlns:wp="http://schemas.openxmlformats.org/drawingml/2006/wordprocessingDrawing" xmlns:w="http://schemas.openxmlformats.org/wordprocessingml/2006/main" xmlns:m="http://schemas.openxmlformats.org/officeDocument/2006/math" xmlns="">
+    <mc:Fallback xmlns="" xmlns:m="http://schemas.openxmlformats.org/officeDocument/2006/math" xmlns:w="http://schemas.openxmlformats.org/wordprocessingml/2006/main" xmlns:wp="http://schemas.openxmlformats.org/drawingml/2006/wordprocessingDrawing" xmlns:a14="http://schemas.microsoft.com/office/drawing/2010/main" xmlns:p15="http://schemas.microsoft.com/office/powerpoint/2012/main" xmlns:p159="http://schemas.microsoft.com/office/powerpoint/2015/09/main">
       <p:transition spd="med">
         <p:fade/>
       </p:transition>
@@ -10573,7 +10573,7 @@
         <p:fade/>
       </p:transition>
     </mc:Choice>
-    <mc:Fallback xmlns="" xmlns:m="http://schemas.openxmlformats.org/officeDocument/2006/math" xmlns:w="http://schemas.openxmlformats.org/wordprocessingml/2006/main" xmlns:wp="http://schemas.openxmlformats.org/drawingml/2006/wordprocessingDrawing" xmlns:a14="http://schemas.microsoft.com/office/drawing/2010/main" xmlns:p15="http://schemas.microsoft.com/office/powerpoint/2012/main" xmlns:p159="http://schemas.microsoft.com/office/powerpoint/2015/09/main">
+    <mc:Fallback xmlns:p159="http://schemas.microsoft.com/office/powerpoint/2015/09/main" xmlns:p15="http://schemas.microsoft.com/office/powerpoint/2012/main" xmlns:a14="http://schemas.microsoft.com/office/drawing/2010/main" xmlns:wp="http://schemas.openxmlformats.org/drawingml/2006/wordprocessingDrawing" xmlns:w="http://schemas.openxmlformats.org/wordprocessingml/2006/main" xmlns:m="http://schemas.openxmlformats.org/officeDocument/2006/math" xmlns="">
       <p:transition spd="med">
         <p:fade/>
       </p:transition>
@@ -11183,7 +11183,7 @@
         <p:fade/>
       </p:transition>
     </mc:Choice>
-    <mc:Fallback xmlns:p159="http://schemas.microsoft.com/office/powerpoint/2015/09/main" xmlns:p15="http://schemas.microsoft.com/office/powerpoint/2012/main" xmlns:a14="http://schemas.microsoft.com/office/drawing/2010/main" xmlns:wp="http://schemas.openxmlformats.org/drawingml/2006/wordprocessingDrawing" xmlns:w="http://schemas.openxmlformats.org/wordprocessingml/2006/main" xmlns:m="http://schemas.openxmlformats.org/officeDocument/2006/math" xmlns="">
+    <mc:Fallback xmlns="" xmlns:m="http://schemas.openxmlformats.org/officeDocument/2006/math" xmlns:w="http://schemas.openxmlformats.org/wordprocessingml/2006/main" xmlns:wp="http://schemas.openxmlformats.org/drawingml/2006/wordprocessingDrawing" xmlns:a14="http://schemas.microsoft.com/office/drawing/2010/main" xmlns:p15="http://schemas.microsoft.com/office/powerpoint/2012/main" xmlns:p159="http://schemas.microsoft.com/office/powerpoint/2015/09/main">
       <p:transition spd="med">
         <p:fade/>
       </p:transition>
@@ -11576,7 +11576,7 @@
         <p:fade/>
       </p:transition>
     </mc:Choice>
-    <mc1:Fallback xmlns:mc1="http://schemas.openxmlformats.org/markup-compatibility/2006" xmlns="">
+    <mc1:Fallback xmlns="" xmlns:mc1="http://schemas.openxmlformats.org/markup-compatibility/2006">
       <p:transition spd="slow">
         <p:fade/>
       </p:transition>
@@ -13294,7 +13294,7 @@
         <p:fade/>
       </p:transition>
     </mc:Choice>
-    <mc:Fallback xmlns:p159="http://schemas.microsoft.com/office/powerpoint/2015/09/main" xmlns:p15="http://schemas.microsoft.com/office/powerpoint/2012/main" xmlns:a14="http://schemas.microsoft.com/office/drawing/2010/main" xmlns:wp="http://schemas.openxmlformats.org/drawingml/2006/wordprocessingDrawing" xmlns:w="http://schemas.openxmlformats.org/wordprocessingml/2006/main" xmlns:m="http://schemas.openxmlformats.org/officeDocument/2006/math" xmlns="">
+    <mc:Fallback xmlns="" xmlns:m="http://schemas.openxmlformats.org/officeDocument/2006/math" xmlns:w="http://schemas.openxmlformats.org/wordprocessingml/2006/main" xmlns:wp="http://schemas.openxmlformats.org/drawingml/2006/wordprocessingDrawing" xmlns:a14="http://schemas.microsoft.com/office/drawing/2010/main" xmlns:p15="http://schemas.microsoft.com/office/powerpoint/2012/main" xmlns:p159="http://schemas.microsoft.com/office/powerpoint/2015/09/main">
       <p:transition spd="med">
         <p:fade/>
       </p:transition>
@@ -14984,7 +14984,7 @@
         <p:fade/>
       </p:transition>
     </mc:Choice>
-    <mc:Fallback xmlns:p159="http://schemas.microsoft.com/office/powerpoint/2015/09/main" xmlns:p15="http://schemas.microsoft.com/office/powerpoint/2012/main" xmlns:a14="http://schemas.microsoft.com/office/drawing/2010/main" xmlns:wp="http://schemas.openxmlformats.org/drawingml/2006/wordprocessingDrawing" xmlns:w="http://schemas.openxmlformats.org/wordprocessingml/2006/main" xmlns:m="http://schemas.openxmlformats.org/officeDocument/2006/math" xmlns="">
+    <mc:Fallback xmlns="" xmlns:m="http://schemas.openxmlformats.org/officeDocument/2006/math" xmlns:w="http://schemas.openxmlformats.org/wordprocessingml/2006/main" xmlns:wp="http://schemas.openxmlformats.org/drawingml/2006/wordprocessingDrawing" xmlns:a14="http://schemas.microsoft.com/office/drawing/2010/main" xmlns:p15="http://schemas.microsoft.com/office/powerpoint/2012/main" xmlns:p159="http://schemas.microsoft.com/office/powerpoint/2015/09/main">
       <p:transition spd="med">
         <p:fade/>
       </p:transition>
@@ -17215,7 +17215,7 @@
         <p:fade/>
       </p:transition>
     </mc:Choice>
-    <mc:Fallback xmlns="" xmlns:m="http://schemas.openxmlformats.org/officeDocument/2006/math" xmlns:w="http://schemas.openxmlformats.org/wordprocessingml/2006/main" xmlns:wp="http://schemas.openxmlformats.org/drawingml/2006/wordprocessingDrawing" xmlns:a14="http://schemas.microsoft.com/office/drawing/2010/main" xmlns:p15="http://schemas.microsoft.com/office/powerpoint/2012/main" xmlns:p159="http://schemas.microsoft.com/office/powerpoint/2015/09/main">
+    <mc:Fallback xmlns:p159="http://schemas.microsoft.com/office/powerpoint/2015/09/main" xmlns:p15="http://schemas.microsoft.com/office/powerpoint/2012/main" xmlns:a14="http://schemas.microsoft.com/office/drawing/2010/main" xmlns:wp="http://schemas.openxmlformats.org/drawingml/2006/wordprocessingDrawing" xmlns:w="http://schemas.openxmlformats.org/wordprocessingml/2006/main" xmlns:m="http://schemas.openxmlformats.org/officeDocument/2006/math" xmlns="">
       <p:transition spd="med">
         <p:fade/>
       </p:transition>
@@ -18528,7 +18528,7 @@
         <p:fade/>
       </p:transition>
     </mc:Choice>
-    <mc:Fallback xmlns:p159="http://schemas.microsoft.com/office/powerpoint/2015/09/main" xmlns:p15="http://schemas.microsoft.com/office/powerpoint/2012/main" xmlns:a14="http://schemas.microsoft.com/office/drawing/2010/main" xmlns:wp="http://schemas.openxmlformats.org/drawingml/2006/wordprocessingDrawing" xmlns:w="http://schemas.openxmlformats.org/wordprocessingml/2006/main" xmlns:m="http://schemas.openxmlformats.org/officeDocument/2006/math" xmlns="">
+    <mc:Fallback xmlns="" xmlns:m="http://schemas.openxmlformats.org/officeDocument/2006/math" xmlns:w="http://schemas.openxmlformats.org/wordprocessingml/2006/main" xmlns:wp="http://schemas.openxmlformats.org/drawingml/2006/wordprocessingDrawing" xmlns:a14="http://schemas.microsoft.com/office/drawing/2010/main" xmlns:p15="http://schemas.microsoft.com/office/powerpoint/2012/main" xmlns:p159="http://schemas.microsoft.com/office/powerpoint/2015/09/main">
       <p:transition spd="med">
         <p:fade/>
       </p:transition>
@@ -20048,7 +20048,7 @@
         <p:fade/>
       </p:transition>
     </mc:Choice>
-    <mc:Fallback xmlns:p159="http://schemas.microsoft.com/office/powerpoint/2015/09/main" xmlns:p15="http://schemas.microsoft.com/office/powerpoint/2012/main" xmlns:a14="http://schemas.microsoft.com/office/drawing/2010/main" xmlns:wp="http://schemas.openxmlformats.org/drawingml/2006/wordprocessingDrawing" xmlns:w="http://schemas.openxmlformats.org/wordprocessingml/2006/main" xmlns:m="http://schemas.openxmlformats.org/officeDocument/2006/math" xmlns="">
+    <mc:Fallback xmlns="" xmlns:m="http://schemas.openxmlformats.org/officeDocument/2006/math" xmlns:w="http://schemas.openxmlformats.org/wordprocessingml/2006/main" xmlns:wp="http://schemas.openxmlformats.org/drawingml/2006/wordprocessingDrawing" xmlns:a14="http://schemas.microsoft.com/office/drawing/2010/main" xmlns:p15="http://schemas.microsoft.com/office/powerpoint/2012/main" xmlns:p159="http://schemas.microsoft.com/office/powerpoint/2015/09/main">
       <p:transition spd="med">
         <p:fade/>
       </p:transition>
@@ -21788,7 +21788,7 @@
         <p:fade/>
       </p:transition>
     </mc:Choice>
-    <mc:Fallback xmlns:p159="http://schemas.microsoft.com/office/powerpoint/2015/09/main" xmlns:p15="http://schemas.microsoft.com/office/powerpoint/2012/main" xmlns:a14="http://schemas.microsoft.com/office/drawing/2010/main" xmlns:wp="http://schemas.openxmlformats.org/drawingml/2006/wordprocessingDrawing" xmlns:w="http://schemas.openxmlformats.org/wordprocessingml/2006/main" xmlns:m="http://schemas.openxmlformats.org/officeDocument/2006/math" xmlns="">
+    <mc:Fallback xmlns="" xmlns:m="http://schemas.openxmlformats.org/officeDocument/2006/math" xmlns:w="http://schemas.openxmlformats.org/wordprocessingml/2006/main" xmlns:wp="http://schemas.openxmlformats.org/drawingml/2006/wordprocessingDrawing" xmlns:a14="http://schemas.microsoft.com/office/drawing/2010/main" xmlns:p15="http://schemas.microsoft.com/office/powerpoint/2012/main" xmlns:p159="http://schemas.microsoft.com/office/powerpoint/2015/09/main">
       <p:transition spd="med">
         <p:fade/>
       </p:transition>
@@ -24764,7 +24764,7 @@
         </p:blipFill>
         <p:spPr>
           <a:xfrm>
-            <a:off x="5288280" y="4053840"/>
+            <a:off x="5288280" y="4027115"/>
             <a:ext cx="6309360" cy="2499360"/>
           </a:xfrm>
           <a:prstGeom prst="rect">
@@ -24891,14 +24891,14 @@
               </a:lnSpc>
             </a:pPr>
             <a:r>
-              <a:rPr lang="en-US" sz="1440">
+              <a:rPr lang="en-US" sz="1440" dirty="0" err="1">
                 <a:solidFill>
                   <a:srgbClr val="374151"/>
                 </a:solidFill>
               </a:rPr>
               <a:t>耦合状态</a:t>
             </a:r>
-            <a:endParaRPr lang="en-US" sz="1440"/>
+            <a:endParaRPr lang="en-US" sz="1440" dirty="0"/>
           </a:p>
         </p:txBody>
       </p:sp>
@@ -25531,7 +25531,7 @@
               </a:lnSpc>
             </a:pPr>
             <a:r>
-              <a:rPr lang="en-US" sz="1440">
+              <a:rPr lang="en-US" sz="1440" dirty="0">
                 <a:solidFill>
                   <a:srgbClr val="16A34A"/>
                 </a:solidFill>
@@ -25539,14 +25539,14 @@
               <a:t>✓</a:t>
             </a:r>
             <a:r>
-              <a:rPr lang="en-US" sz="1440">
+              <a:rPr lang="en-US" sz="1440" dirty="0" err="1">
                 <a:solidFill>
                   <a:srgbClr val="4B5563"/>
                 </a:solidFill>
               </a:rPr>
               <a:t>强耦合</a:t>
             </a:r>
-            <a:endParaRPr lang="en-US" sz="1440"/>
+            <a:endParaRPr lang="en-US" sz="1440" dirty="0"/>
           </a:p>
         </p:txBody>
       </p:sp>

--- a/docs/ppt/孟帅_毕设开题.pptx
+++ b/docs/ppt/孟帅_毕设开题.pptx
@@ -210,7 +210,7 @@
           <a:p>
             <a:fld id="{2105C8FE-0176-40C5-9514-1F7F7A4E530E}" type="datetimeFigureOut">
               <a:rPr lang="zh-CN" altLang="en-US" smtClean="0"/>
-              <a:t>2026/3/30</a:t>
+              <a:t>2026/1/6</a:t>
             </a:fld>
             <a:endParaRPr lang="zh-CN" altLang="en-US"/>
           </a:p>
@@ -1829,7 +1829,7 @@
           <a:p>
             <a:fld id="{7D3EF85B-AD69-4594-A51C-3BA94401DC9B}" type="datetimeFigureOut">
               <a:rPr lang="zh-CN" altLang="en-US" smtClean="0"/>
-              <a:t>2026/3/30</a:t>
+              <a:t>2026/1/6</a:t>
             </a:fld>
             <a:endParaRPr lang="zh-CN" altLang="en-US"/>
           </a:p>
@@ -2027,7 +2027,7 @@
           <a:p>
             <a:fld id="{7D3EF85B-AD69-4594-A51C-3BA94401DC9B}" type="datetimeFigureOut">
               <a:rPr lang="zh-CN" altLang="en-US" smtClean="0"/>
-              <a:t>2026/3/30</a:t>
+              <a:t>2026/1/6</a:t>
             </a:fld>
             <a:endParaRPr lang="zh-CN" altLang="en-US"/>
           </a:p>
@@ -2235,7 +2235,7 @@
           <a:p>
             <a:fld id="{7D3EF85B-AD69-4594-A51C-3BA94401DC9B}" type="datetimeFigureOut">
               <a:rPr lang="zh-CN" altLang="en-US" smtClean="0"/>
-              <a:t>2026/3/30</a:t>
+              <a:t>2026/1/6</a:t>
             </a:fld>
             <a:endParaRPr lang="zh-CN" altLang="en-US"/>
           </a:p>
@@ -2469,7 +2469,7 @@
           <a:p>
             <a:fld id="{7D3EF85B-AD69-4594-A51C-3BA94401DC9B}" type="datetimeFigureOut">
               <a:rPr lang="zh-CN" altLang="en-US" smtClean="0"/>
-              <a:t>2026/3/30</a:t>
+              <a:t>2026/1/6</a:t>
             </a:fld>
             <a:endParaRPr lang="zh-CN" altLang="en-US"/>
           </a:p>
@@ -2744,7 +2744,7 @@
           <a:p>
             <a:fld id="{7D3EF85B-AD69-4594-A51C-3BA94401DC9B}" type="datetimeFigureOut">
               <a:rPr lang="zh-CN" altLang="en-US" smtClean="0"/>
-              <a:t>2026/3/30</a:t>
+              <a:t>2026/1/6</a:t>
             </a:fld>
             <a:endParaRPr lang="zh-CN" altLang="en-US"/>
           </a:p>
@@ -3009,7 +3009,7 @@
           <a:p>
             <a:fld id="{7D3EF85B-AD69-4594-A51C-3BA94401DC9B}" type="datetimeFigureOut">
               <a:rPr lang="zh-CN" altLang="en-US" smtClean="0"/>
-              <a:t>2026/3/30</a:t>
+              <a:t>2026/1/6</a:t>
             </a:fld>
             <a:endParaRPr lang="zh-CN" altLang="en-US"/>
           </a:p>
@@ -3421,7 +3421,7 @@
           <a:p>
             <a:fld id="{7D3EF85B-AD69-4594-A51C-3BA94401DC9B}" type="datetimeFigureOut">
               <a:rPr lang="zh-CN" altLang="en-US" smtClean="0"/>
-              <a:t>2026/3/30</a:t>
+              <a:t>2026/1/6</a:t>
             </a:fld>
             <a:endParaRPr lang="zh-CN" altLang="en-US"/>
           </a:p>
@@ -3562,7 +3562,7 @@
           <a:p>
             <a:fld id="{7D3EF85B-AD69-4594-A51C-3BA94401DC9B}" type="datetimeFigureOut">
               <a:rPr lang="zh-CN" altLang="en-US" smtClean="0"/>
-              <a:t>2026/3/30</a:t>
+              <a:t>2026/1/6</a:t>
             </a:fld>
             <a:endParaRPr lang="zh-CN" altLang="en-US"/>
           </a:p>
@@ -3675,7 +3675,7 @@
           <a:p>
             <a:fld id="{7D3EF85B-AD69-4594-A51C-3BA94401DC9B}" type="datetimeFigureOut">
               <a:rPr lang="zh-CN" altLang="en-US" smtClean="0"/>
-              <a:t>2026/3/30</a:t>
+              <a:t>2026/1/6</a:t>
             </a:fld>
             <a:endParaRPr lang="zh-CN" altLang="en-US"/>
           </a:p>
@@ -3986,7 +3986,7 @@
           <a:p>
             <a:fld id="{7D3EF85B-AD69-4594-A51C-3BA94401DC9B}" type="datetimeFigureOut">
               <a:rPr lang="zh-CN" altLang="en-US" smtClean="0"/>
-              <a:t>2026/3/30</a:t>
+              <a:t>2026/1/6</a:t>
             </a:fld>
             <a:endParaRPr lang="zh-CN" altLang="en-US"/>
           </a:p>
@@ -4274,7 +4274,7 @@
           <a:p>
             <a:fld id="{7D3EF85B-AD69-4594-A51C-3BA94401DC9B}" type="datetimeFigureOut">
               <a:rPr lang="zh-CN" altLang="en-US" smtClean="0"/>
-              <a:t>2026/3/30</a:t>
+              <a:t>2026/1/6</a:t>
             </a:fld>
             <a:endParaRPr lang="zh-CN" altLang="en-US"/>
           </a:p>
@@ -4515,7 +4515,7 @@
           <a:p>
             <a:fld id="{7D3EF85B-AD69-4594-A51C-3BA94401DC9B}" type="datetimeFigureOut">
               <a:rPr lang="zh-CN" altLang="en-US" smtClean="0"/>
-              <a:t>2026/3/30</a:t>
+              <a:t>2026/1/6</a:t>
             </a:fld>
             <a:endParaRPr lang="zh-CN" altLang="en-US"/>
           </a:p>
@@ -5421,7 +5421,7 @@
         <p:fade/>
       </p:transition>
     </mc:Choice>
-    <mc:Fallback xmlns="" xmlns:m="http://schemas.openxmlformats.org/officeDocument/2006/math" xmlns:w="http://schemas.openxmlformats.org/wordprocessingml/2006/main" xmlns:wp="http://schemas.openxmlformats.org/drawingml/2006/wordprocessingDrawing" xmlns:a14="http://schemas.microsoft.com/office/drawing/2010/main" xmlns:p15="http://schemas.microsoft.com/office/powerpoint/2012/main" xmlns:p159="http://schemas.microsoft.com/office/powerpoint/2015/09/main">
+    <mc:Fallback xmlns:p159="http://schemas.microsoft.com/office/powerpoint/2015/09/main" xmlns:p15="http://schemas.microsoft.com/office/powerpoint/2012/main" xmlns:a14="http://schemas.microsoft.com/office/drawing/2010/main" xmlns:wp="http://schemas.openxmlformats.org/drawingml/2006/wordprocessingDrawing" xmlns:w="http://schemas.openxmlformats.org/wordprocessingml/2006/main" xmlns:m="http://schemas.openxmlformats.org/officeDocument/2006/math" xmlns="">
       <p:transition spd="med">
         <p:fade/>
       </p:transition>
@@ -6543,7 +6543,7 @@
         <p:fade/>
       </p:transition>
     </mc:Choice>
-    <mc:Fallback xmlns="" xmlns:m="http://schemas.openxmlformats.org/officeDocument/2006/math" xmlns:w="http://schemas.openxmlformats.org/wordprocessingml/2006/main" xmlns:wp="http://schemas.openxmlformats.org/drawingml/2006/wordprocessingDrawing" xmlns:a14="http://schemas.microsoft.com/office/drawing/2010/main" xmlns:p15="http://schemas.microsoft.com/office/powerpoint/2012/main" xmlns:p159="http://schemas.microsoft.com/office/powerpoint/2015/09/main">
+    <mc:Fallback xmlns:p159="http://schemas.microsoft.com/office/powerpoint/2015/09/main" xmlns:p15="http://schemas.microsoft.com/office/powerpoint/2012/main" xmlns:a14="http://schemas.microsoft.com/office/drawing/2010/main" xmlns:wp="http://schemas.openxmlformats.org/drawingml/2006/wordprocessingDrawing" xmlns:w="http://schemas.openxmlformats.org/wordprocessingml/2006/main" xmlns:m="http://schemas.openxmlformats.org/officeDocument/2006/math" xmlns="">
       <p:transition spd="med">
         <p:fade/>
       </p:transition>
@@ -7744,7 +7744,7 @@
         <p:fade/>
       </p:transition>
     </mc:Choice>
-    <mc:Fallback xmlns="" xmlns:m="http://schemas.openxmlformats.org/officeDocument/2006/math" xmlns:w="http://schemas.openxmlformats.org/wordprocessingml/2006/main" xmlns:wp="http://schemas.openxmlformats.org/drawingml/2006/wordprocessingDrawing" xmlns:a14="http://schemas.microsoft.com/office/drawing/2010/main" xmlns:p15="http://schemas.microsoft.com/office/powerpoint/2012/main" xmlns:p159="http://schemas.microsoft.com/office/powerpoint/2015/09/main">
+    <mc:Fallback xmlns:p159="http://schemas.microsoft.com/office/powerpoint/2015/09/main" xmlns:p15="http://schemas.microsoft.com/office/powerpoint/2012/main" xmlns:a14="http://schemas.microsoft.com/office/drawing/2010/main" xmlns:wp="http://schemas.openxmlformats.org/drawingml/2006/wordprocessingDrawing" xmlns:w="http://schemas.openxmlformats.org/wordprocessingml/2006/main" xmlns:m="http://schemas.openxmlformats.org/officeDocument/2006/math" xmlns="">
       <p:transition spd="med">
         <p:fade/>
       </p:transition>
@@ -10573,7 +10573,7 @@
         <p:fade/>
       </p:transition>
     </mc:Choice>
-    <mc:Fallback xmlns:p159="http://schemas.microsoft.com/office/powerpoint/2015/09/main" xmlns:p15="http://schemas.microsoft.com/office/powerpoint/2012/main" xmlns:a14="http://schemas.microsoft.com/office/drawing/2010/main" xmlns:wp="http://schemas.openxmlformats.org/drawingml/2006/wordprocessingDrawing" xmlns:w="http://schemas.openxmlformats.org/wordprocessingml/2006/main" xmlns:m="http://schemas.openxmlformats.org/officeDocument/2006/math" xmlns="">
+    <mc:Fallback xmlns="" xmlns:m="http://schemas.openxmlformats.org/officeDocument/2006/math" xmlns:w="http://schemas.openxmlformats.org/wordprocessingml/2006/main" xmlns:wp="http://schemas.openxmlformats.org/drawingml/2006/wordprocessingDrawing" xmlns:a14="http://schemas.microsoft.com/office/drawing/2010/main" xmlns:p15="http://schemas.microsoft.com/office/powerpoint/2012/main" xmlns:p159="http://schemas.microsoft.com/office/powerpoint/2015/09/main">
       <p:transition spd="med">
         <p:fade/>
       </p:transition>
@@ -11183,7 +11183,7 @@
         <p:fade/>
       </p:transition>
     </mc:Choice>
-    <mc:Fallback xmlns="" xmlns:m="http://schemas.openxmlformats.org/officeDocument/2006/math" xmlns:w="http://schemas.openxmlformats.org/wordprocessingml/2006/main" xmlns:wp="http://schemas.openxmlformats.org/drawingml/2006/wordprocessingDrawing" xmlns:a14="http://schemas.microsoft.com/office/drawing/2010/main" xmlns:p15="http://schemas.microsoft.com/office/powerpoint/2012/main" xmlns:p159="http://schemas.microsoft.com/office/powerpoint/2015/09/main">
+    <mc:Fallback xmlns:p159="http://schemas.microsoft.com/office/powerpoint/2015/09/main" xmlns:p15="http://schemas.microsoft.com/office/powerpoint/2012/main" xmlns:a14="http://schemas.microsoft.com/office/drawing/2010/main" xmlns:wp="http://schemas.openxmlformats.org/drawingml/2006/wordprocessingDrawing" xmlns:w="http://schemas.openxmlformats.org/wordprocessingml/2006/main" xmlns:m="http://schemas.openxmlformats.org/officeDocument/2006/math" xmlns="">
       <p:transition spd="med">
         <p:fade/>
       </p:transition>
@@ -11576,7 +11576,7 @@
         <p:fade/>
       </p:transition>
     </mc:Choice>
-    <mc1:Fallback xmlns="" xmlns:mc1="http://schemas.openxmlformats.org/markup-compatibility/2006">
+    <mc1:Fallback xmlns:mc1="http://schemas.openxmlformats.org/markup-compatibility/2006" xmlns="">
       <p:transition spd="slow">
         <p:fade/>
       </p:transition>
@@ -13294,7 +13294,7 @@
         <p:fade/>
       </p:transition>
     </mc:Choice>
-    <mc:Fallback xmlns="" xmlns:m="http://schemas.openxmlformats.org/officeDocument/2006/math" xmlns:w="http://schemas.openxmlformats.org/wordprocessingml/2006/main" xmlns:wp="http://schemas.openxmlformats.org/drawingml/2006/wordprocessingDrawing" xmlns:a14="http://schemas.microsoft.com/office/drawing/2010/main" xmlns:p15="http://schemas.microsoft.com/office/powerpoint/2012/main" xmlns:p159="http://schemas.microsoft.com/office/powerpoint/2015/09/main">
+    <mc:Fallback xmlns:p159="http://schemas.microsoft.com/office/powerpoint/2015/09/main" xmlns:p15="http://schemas.microsoft.com/office/powerpoint/2012/main" xmlns:a14="http://schemas.microsoft.com/office/drawing/2010/main" xmlns:wp="http://schemas.openxmlformats.org/drawingml/2006/wordprocessingDrawing" xmlns:w="http://schemas.openxmlformats.org/wordprocessingml/2006/main" xmlns:m="http://schemas.openxmlformats.org/officeDocument/2006/math" xmlns="">
       <p:transition spd="med">
         <p:fade/>
       </p:transition>
@@ -14984,7 +14984,7 @@
         <p:fade/>
       </p:transition>
     </mc:Choice>
-    <mc:Fallback xmlns="" xmlns:m="http://schemas.openxmlformats.org/officeDocument/2006/math" xmlns:w="http://schemas.openxmlformats.org/wordprocessingml/2006/main" xmlns:wp="http://schemas.openxmlformats.org/drawingml/2006/wordprocessingDrawing" xmlns:a14="http://schemas.microsoft.com/office/drawing/2010/main" xmlns:p15="http://schemas.microsoft.com/office/powerpoint/2012/main" xmlns:p159="http://schemas.microsoft.com/office/powerpoint/2015/09/main">
+    <mc:Fallback xmlns:p159="http://schemas.microsoft.com/office/powerpoint/2015/09/main" xmlns:p15="http://schemas.microsoft.com/office/powerpoint/2012/main" xmlns:a14="http://schemas.microsoft.com/office/drawing/2010/main" xmlns:wp="http://schemas.openxmlformats.org/drawingml/2006/wordprocessingDrawing" xmlns:w="http://schemas.openxmlformats.org/wordprocessingml/2006/main" xmlns:m="http://schemas.openxmlformats.org/officeDocument/2006/math" xmlns="">
       <p:transition spd="med">
         <p:fade/>
       </p:transition>
@@ -17215,7 +17215,7 @@
         <p:fade/>
       </p:transition>
     </mc:Choice>
-    <mc:Fallback xmlns:p159="http://schemas.microsoft.com/office/powerpoint/2015/09/main" xmlns:p15="http://schemas.microsoft.com/office/powerpoint/2012/main" xmlns:a14="http://schemas.microsoft.com/office/drawing/2010/main" xmlns:wp="http://schemas.openxmlformats.org/drawingml/2006/wordprocessingDrawing" xmlns:w="http://schemas.openxmlformats.org/wordprocessingml/2006/main" xmlns:m="http://schemas.openxmlformats.org/officeDocument/2006/math" xmlns="">
+    <mc:Fallback xmlns="" xmlns:m="http://schemas.openxmlformats.org/officeDocument/2006/math" xmlns:w="http://schemas.openxmlformats.org/wordprocessingml/2006/main" xmlns:wp="http://schemas.openxmlformats.org/drawingml/2006/wordprocessingDrawing" xmlns:a14="http://schemas.microsoft.com/office/drawing/2010/main" xmlns:p15="http://schemas.microsoft.com/office/powerpoint/2012/main" xmlns:p159="http://schemas.microsoft.com/office/powerpoint/2015/09/main">
       <p:transition spd="med">
         <p:fade/>
       </p:transition>
@@ -18528,7 +18528,7 @@
         <p:fade/>
       </p:transition>
     </mc:Choice>
-    <mc:Fallback xmlns="" xmlns:m="http://schemas.openxmlformats.org/officeDocument/2006/math" xmlns:w="http://schemas.openxmlformats.org/wordprocessingml/2006/main" xmlns:wp="http://schemas.openxmlformats.org/drawingml/2006/wordprocessingDrawing" xmlns:a14="http://schemas.microsoft.com/office/drawing/2010/main" xmlns:p15="http://schemas.microsoft.com/office/powerpoint/2012/main" xmlns:p159="http://schemas.microsoft.com/office/powerpoint/2015/09/main">
+    <mc:Fallback xmlns:p159="http://schemas.microsoft.com/office/powerpoint/2015/09/main" xmlns:p15="http://schemas.microsoft.com/office/powerpoint/2012/main" xmlns:a14="http://schemas.microsoft.com/office/drawing/2010/main" xmlns:wp="http://schemas.openxmlformats.org/drawingml/2006/wordprocessingDrawing" xmlns:w="http://schemas.openxmlformats.org/wordprocessingml/2006/main" xmlns:m="http://schemas.openxmlformats.org/officeDocument/2006/math" xmlns="">
       <p:transition spd="med">
         <p:fade/>
       </p:transition>
@@ -20048,7 +20048,7 @@
         <p:fade/>
       </p:transition>
     </mc:Choice>
-    <mc:Fallback xmlns="" xmlns:m="http://schemas.openxmlformats.org/officeDocument/2006/math" xmlns:w="http://schemas.openxmlformats.org/wordprocessingml/2006/main" xmlns:wp="http://schemas.openxmlformats.org/drawingml/2006/wordprocessingDrawing" xmlns:a14="http://schemas.microsoft.com/office/drawing/2010/main" xmlns:p15="http://schemas.microsoft.com/office/powerpoint/2012/main" xmlns:p159="http://schemas.microsoft.com/office/powerpoint/2015/09/main">
+    <mc:Fallback xmlns:p159="http://schemas.microsoft.com/office/powerpoint/2015/09/main" xmlns:p15="http://schemas.microsoft.com/office/powerpoint/2012/main" xmlns:a14="http://schemas.microsoft.com/office/drawing/2010/main" xmlns:wp="http://schemas.openxmlformats.org/drawingml/2006/wordprocessingDrawing" xmlns:w="http://schemas.openxmlformats.org/wordprocessingml/2006/main" xmlns:m="http://schemas.openxmlformats.org/officeDocument/2006/math" xmlns="">
       <p:transition spd="med">
         <p:fade/>
       </p:transition>
@@ -21788,7 +21788,7 @@
         <p:fade/>
       </p:transition>
     </mc:Choice>
-    <mc:Fallback xmlns="" xmlns:m="http://schemas.openxmlformats.org/officeDocument/2006/math" xmlns:w="http://schemas.openxmlformats.org/wordprocessingml/2006/main" xmlns:wp="http://schemas.openxmlformats.org/drawingml/2006/wordprocessingDrawing" xmlns:a14="http://schemas.microsoft.com/office/drawing/2010/main" xmlns:p15="http://schemas.microsoft.com/office/powerpoint/2012/main" xmlns:p159="http://schemas.microsoft.com/office/powerpoint/2015/09/main">
+    <mc:Fallback xmlns:p159="http://schemas.microsoft.com/office/powerpoint/2015/09/main" xmlns:p15="http://schemas.microsoft.com/office/powerpoint/2012/main" xmlns:a14="http://schemas.microsoft.com/office/drawing/2010/main" xmlns:wp="http://schemas.openxmlformats.org/drawingml/2006/wordprocessingDrawing" xmlns:w="http://schemas.openxmlformats.org/wordprocessingml/2006/main" xmlns:m="http://schemas.openxmlformats.org/officeDocument/2006/math" xmlns="">
       <p:transition spd="med">
         <p:fade/>
       </p:transition>
@@ -24764,7 +24764,7 @@
         </p:blipFill>
         <p:spPr>
           <a:xfrm>
-            <a:off x="5288280" y="4027115"/>
+            <a:off x="5288280" y="4053840"/>
             <a:ext cx="6309360" cy="2499360"/>
           </a:xfrm>
           <a:prstGeom prst="rect">
@@ -24891,14 +24891,14 @@
               </a:lnSpc>
             </a:pPr>
             <a:r>
-              <a:rPr lang="en-US" sz="1440" dirty="0" err="1">
+              <a:rPr lang="en-US" sz="1440">
                 <a:solidFill>
                   <a:srgbClr val="374151"/>
                 </a:solidFill>
               </a:rPr>
               <a:t>耦合状态</a:t>
             </a:r>
-            <a:endParaRPr lang="en-US" sz="1440" dirty="0"/>
+            <a:endParaRPr lang="en-US" sz="1440"/>
           </a:p>
         </p:txBody>
       </p:sp>
@@ -25531,7 +25531,7 @@
               </a:lnSpc>
             </a:pPr>
             <a:r>
-              <a:rPr lang="en-US" sz="1440" dirty="0">
+              <a:rPr lang="en-US" sz="1440">
                 <a:solidFill>
                   <a:srgbClr val="16A34A"/>
                 </a:solidFill>
@@ -25539,14 +25539,14 @@
               <a:t>✓</a:t>
             </a:r>
             <a:r>
-              <a:rPr lang="en-US" sz="1440" dirty="0" err="1">
+              <a:rPr lang="en-US" sz="1440">
                 <a:solidFill>
                   <a:srgbClr val="4B5563"/>
                 </a:solidFill>
               </a:rPr>
               <a:t>强耦合</a:t>
             </a:r>
-            <a:endParaRPr lang="en-US" sz="1440" dirty="0"/>
+            <a:endParaRPr lang="en-US" sz="1440"/>
           </a:p>
         </p:txBody>
       </p:sp>
